--- a/RAG/PPTXs/RAG.pptx
+++ b/RAG/PPTXs/RAG.pptx
@@ -23,8 +23,7 @@
     <p:sldId id="272" r:id="rId17"/>
     <p:sldId id="273" r:id="rId18"/>
     <p:sldId id="274" r:id="rId19"/>
-    <p:sldId id="275" r:id="rId20"/>
-    <p:sldId id="276" r:id="rId21"/>
+    <p:sldId id="276" r:id="rId20"/>
   </p:sldIdLst>
   <p:sldSz cx="12192000" cy="6858000"/>
   <p:notesSz cx="6858000" cy="9144000"/>
@@ -321,7 +320,7 @@
           <a:p>
             <a:fld id="{5BCAD085-E8A6-8845-BD4E-CB4CCA059FC4}" type="datetimeFigureOut">
               <a:rPr lang="en-US" smtClean="0"/>
-              <a:t>8/21/26</a:t>
+              <a:t>9/11/26</a:t>
             </a:fld>
             <a:endParaRPr lang="en-US"/>
           </a:p>
@@ -489,7 +488,7 @@
           <a:p>
             <a:fld id="{5BCAD085-E8A6-8845-BD4E-CB4CCA059FC4}" type="datetimeFigureOut">
               <a:rPr lang="en-US" smtClean="0"/>
-              <a:t>8/21/26</a:t>
+              <a:t>9/11/26</a:t>
             </a:fld>
             <a:endParaRPr lang="en-US"/>
           </a:p>
@@ -667,7 +666,7 @@
           <a:p>
             <a:fld id="{5BCAD085-E8A6-8845-BD4E-CB4CCA059FC4}" type="datetimeFigureOut">
               <a:rPr lang="en-US" smtClean="0"/>
-              <a:t>8/21/26</a:t>
+              <a:t>9/11/26</a:t>
             </a:fld>
             <a:endParaRPr lang="en-US"/>
           </a:p>
@@ -835,7 +834,7 @@
           <a:p>
             <a:fld id="{5BCAD085-E8A6-8845-BD4E-CB4CCA059FC4}" type="datetimeFigureOut">
               <a:rPr lang="en-US" smtClean="0"/>
-              <a:t>8/21/26</a:t>
+              <a:t>9/11/26</a:t>
             </a:fld>
             <a:endParaRPr lang="en-US"/>
           </a:p>
@@ -1080,7 +1079,7 @@
           <a:p>
             <a:fld id="{5BCAD085-E8A6-8845-BD4E-CB4CCA059FC4}" type="datetimeFigureOut">
               <a:rPr lang="en-US" smtClean="0"/>
-              <a:t>8/21/26</a:t>
+              <a:t>9/11/26</a:t>
             </a:fld>
             <a:endParaRPr lang="en-US"/>
           </a:p>
@@ -1365,7 +1364,7 @@
           <a:p>
             <a:fld id="{5BCAD085-E8A6-8845-BD4E-CB4CCA059FC4}" type="datetimeFigureOut">
               <a:rPr lang="en-US" smtClean="0"/>
-              <a:t>8/21/26</a:t>
+              <a:t>9/11/26</a:t>
             </a:fld>
             <a:endParaRPr lang="en-US"/>
           </a:p>
@@ -1784,7 +1783,7 @@
           <a:p>
             <a:fld id="{5BCAD085-E8A6-8845-BD4E-CB4CCA059FC4}" type="datetimeFigureOut">
               <a:rPr lang="en-US" smtClean="0"/>
-              <a:t>8/21/26</a:t>
+              <a:t>9/11/26</a:t>
             </a:fld>
             <a:endParaRPr lang="en-US"/>
           </a:p>
@@ -1901,7 +1900,7 @@
           <a:p>
             <a:fld id="{5BCAD085-E8A6-8845-BD4E-CB4CCA059FC4}" type="datetimeFigureOut">
               <a:rPr lang="en-US" smtClean="0"/>
-              <a:t>8/21/26</a:t>
+              <a:t>9/11/26</a:t>
             </a:fld>
             <a:endParaRPr lang="en-US"/>
           </a:p>
@@ -1996,7 +1995,7 @@
           <a:p>
             <a:fld id="{5BCAD085-E8A6-8845-BD4E-CB4CCA059FC4}" type="datetimeFigureOut">
               <a:rPr lang="en-US" smtClean="0"/>
-              <a:t>8/21/26</a:t>
+              <a:t>9/11/26</a:t>
             </a:fld>
             <a:endParaRPr lang="en-US"/>
           </a:p>
@@ -2271,7 +2270,7 @@
           <a:p>
             <a:fld id="{5BCAD085-E8A6-8845-BD4E-CB4CCA059FC4}" type="datetimeFigureOut">
               <a:rPr lang="en-US" smtClean="0"/>
-              <a:t>8/21/26</a:t>
+              <a:t>9/11/26</a:t>
             </a:fld>
             <a:endParaRPr lang="en-US"/>
           </a:p>
@@ -2523,7 +2522,7 @@
           <a:p>
             <a:fld id="{5BCAD085-E8A6-8845-BD4E-CB4CCA059FC4}" type="datetimeFigureOut">
               <a:rPr lang="en-US" smtClean="0"/>
-              <a:t>8/21/26</a:t>
+              <a:t>9/11/26</a:t>
             </a:fld>
             <a:endParaRPr lang="en-US"/>
           </a:p>
@@ -2734,7 +2733,7 @@
           <a:p>
             <a:fld id="{5BCAD085-E8A6-8845-BD4E-CB4CCA059FC4}" type="datetimeFigureOut">
               <a:rPr lang="en-US" smtClean="0"/>
-              <a:t>8/21/26</a:t>
+              <a:t>9/11/26</a:t>
             </a:fld>
             <a:endParaRPr lang="en-US"/>
           </a:p>
@@ -3197,7 +3196,7 @@
         <p:spPr>
           <a:xfrm>
             <a:off x="685800" y="1417320"/>
-            <a:ext cx="7772400" cy="1463040"/>
+            <a:ext cx="3536609" cy="1046440"/>
           </a:xfrm>
           <a:prstGeom prst="rect">
             <a:avLst/>
@@ -3216,7 +3215,7 @@
               </a:spcAft>
             </a:pPr>
             <a:r>
-              <a:rPr sz="4400" b="1">
+              <a:rPr sz="4400" b="1" dirty="0">
                 <a:solidFill>
                   <a:srgbClr val="FFFFFF"/>
                 </a:solidFill>
@@ -3224,9 +3223,56 @@
               </a:rPr>
               <a:t>Embeddings,</a:t>
             </a:r>
-            <a:br/>
-            <a:r>
-              <a:t>bases vectoriales y RAG</a:t>
+            <a:br>
+              <a:rPr dirty="0"/>
+            </a:br>
+            <a:r>
+              <a:rPr lang="es-419" dirty="0">
+                <a:solidFill>
+                  <a:srgbClr val="FFFF00"/>
+                </a:solidFill>
+              </a:rPr>
+              <a:t>B</a:t>
+            </a:r>
+            <a:r>
+              <a:rPr dirty="0" err="1">
+                <a:solidFill>
+                  <a:srgbClr val="FFFF00"/>
+                </a:solidFill>
+              </a:rPr>
+              <a:t>ases</a:t>
+            </a:r>
+            <a:r>
+              <a:rPr lang="es-419" dirty="0">
+                <a:solidFill>
+                  <a:srgbClr val="FFFF00"/>
+                </a:solidFill>
+              </a:rPr>
+              <a:t> de datos</a:t>
+            </a:r>
+            <a:r>
+              <a:rPr dirty="0">
+                <a:solidFill>
+                  <a:srgbClr val="FFFF00"/>
+                </a:solidFill>
+              </a:rPr>
+              <a:t> </a:t>
+            </a:r>
+            <a:r>
+              <a:rPr dirty="0" err="1">
+                <a:solidFill>
+                  <a:srgbClr val="FFFF00"/>
+                </a:solidFill>
+              </a:rPr>
+              <a:t>vectoriales</a:t>
+            </a:r>
+            <a:r>
+              <a:rPr dirty="0">
+                <a:solidFill>
+                  <a:srgbClr val="FFFF00"/>
+                </a:solidFill>
+              </a:rPr>
+              <a:t> y RAG</a:t>
             </a:r>
           </a:p>
         </p:txBody>
@@ -12608,7 +12654,7 @@
                 </a:solidFill>
                 <a:latin typeface="Aptos"/>
               </a:rPr>
-              <a:t>Actividad en clase</a:t>
+              <a:t>Resumen</a:t>
             </a:r>
           </a:p>
         </p:txBody>
@@ -12642,7 +12688,7 @@
                 </a:solidFill>
                 <a:latin typeface="Aptos"/>
               </a:rPr>
-              <a:t>Diseña un RAG para responder preguntas sobre el material del curso.</a:t>
+              <a:t>La idea completa en cinco frases.</a:t>
             </a:r>
           </a:p>
         </p:txBody>
@@ -12655,8 +12701,8 @@
         </p:nvSpPr>
         <p:spPr>
           <a:xfrm>
-            <a:off x="594360" y="6419088"/>
-            <a:ext cx="10972800" cy="228600"/>
+            <a:off x="7570552" y="6419088"/>
+            <a:ext cx="3996608" cy="223138"/>
           </a:xfrm>
           <a:prstGeom prst="rect">
             <a:avLst/>
@@ -12671,117 +12717,114 @@
           <a:p>
             <a:pPr algn="r"/>
             <a:r>
-              <a:rPr sz="850" b="0">
+              <a:rPr sz="850" b="0" dirty="0">
                 <a:solidFill>
                   <a:srgbClr val="64748B"/>
                 </a:solidFill>
                 <a:latin typeface="Aptos"/>
               </a:rPr>
-              <a:t>RAG | Embeddings, bases vectoriales y sistemas de recuperación aumentada | 20</a:t>
-            </a:r>
-          </a:p>
-        </p:txBody>
-      </p:sp>
-      <p:sp>
-        <p:nvSpPr>
-          <p:cNvPr id="6" name="Rounded Rectangle 5"/>
-          <p:cNvSpPr/>
-          <p:nvPr/>
-        </p:nvSpPr>
-        <p:spPr>
-          <a:xfrm>
-            <a:off x="777240" y="1325880"/>
-            <a:ext cx="3246120" cy="4343400"/>
-          </a:xfrm>
-          <a:prstGeom prst="roundRect">
-            <a:avLst/>
-          </a:prstGeom>
-          <a:solidFill>
-            <a:srgbClr val="FFEDD5"/>
-          </a:solidFill>
-          <a:ln w="12700">
-            <a:solidFill>
-              <a:srgbClr val="CBD5E1"/>
-            </a:solidFill>
-          </a:ln>
-        </p:spPr>
-        <p:style>
-          <a:lnRef idx="1">
-            <a:schemeClr val="accent1"/>
-          </a:lnRef>
-          <a:fillRef idx="3">
-            <a:schemeClr val="accent1"/>
-          </a:fillRef>
-          <a:effectRef idx="2">
-            <a:schemeClr val="accent1"/>
-          </a:effectRef>
-          <a:fontRef idx="minor">
-            <a:schemeClr val="lt1"/>
-          </a:fontRef>
-        </p:style>
-        <p:txBody>
-          <a:bodyPr rtlCol="0" anchor="ctr"/>
-          <a:lstStyle/>
-          <a:p>
-            <a:pPr algn="ctr"/>
-            <a:endParaRPr/>
-          </a:p>
-        </p:txBody>
-      </p:sp>
-      <p:sp>
-        <p:nvSpPr>
-          <p:cNvPr id="7" name="Rectangle 6"/>
-          <p:cNvSpPr/>
-          <p:nvPr/>
-        </p:nvSpPr>
-        <p:spPr>
-          <a:xfrm>
-            <a:off x="777240" y="1325880"/>
-            <a:ext cx="73152" cy="4343400"/>
-          </a:xfrm>
-          <a:prstGeom prst="rect">
-            <a:avLst/>
-          </a:prstGeom>
-          <a:solidFill>
-            <a:srgbClr val="F59E0B"/>
-          </a:solidFill>
-          <a:ln>
-            <a:noFill/>
-          </a:ln>
-        </p:spPr>
-        <p:style>
-          <a:lnRef idx="1">
-            <a:schemeClr val="accent1"/>
-          </a:lnRef>
-          <a:fillRef idx="3">
-            <a:schemeClr val="accent1"/>
-          </a:fillRef>
-          <a:effectRef idx="2">
-            <a:schemeClr val="accent1"/>
-          </a:effectRef>
-          <a:fontRef idx="minor">
-            <a:schemeClr val="lt1"/>
-          </a:fontRef>
-        </p:style>
-        <p:txBody>
-          <a:bodyPr rtlCol="0" anchor="ctr"/>
-          <a:lstStyle/>
-          <a:p>
-            <a:pPr algn="ctr"/>
-            <a:endParaRPr/>
-          </a:p>
-        </p:txBody>
-      </p:sp>
-      <p:sp>
-        <p:nvSpPr>
-          <p:cNvPr id="8" name="TextBox 7"/>
+              <a:t>RAG | Embeddings, bases </a:t>
+            </a:r>
+            <a:r>
+              <a:rPr sz="850" b="0" dirty="0" err="1">
+                <a:solidFill>
+                  <a:srgbClr val="64748B"/>
+                </a:solidFill>
+                <a:latin typeface="Aptos"/>
+              </a:rPr>
+              <a:t>vectoriales</a:t>
+            </a:r>
+            <a:r>
+              <a:rPr sz="850" b="0" dirty="0">
+                <a:solidFill>
+                  <a:srgbClr val="64748B"/>
+                </a:solidFill>
+                <a:latin typeface="Aptos"/>
+              </a:rPr>
+              <a:t> y </a:t>
+            </a:r>
+            <a:r>
+              <a:rPr sz="850" b="0" dirty="0" err="1">
+                <a:solidFill>
+                  <a:srgbClr val="64748B"/>
+                </a:solidFill>
+                <a:latin typeface="Aptos"/>
+              </a:rPr>
+              <a:t>sistemas</a:t>
+            </a:r>
+            <a:r>
+              <a:rPr sz="850" b="0" dirty="0">
+                <a:solidFill>
+                  <a:srgbClr val="64748B"/>
+                </a:solidFill>
+                <a:latin typeface="Aptos"/>
+              </a:rPr>
+              <a:t> de </a:t>
+            </a:r>
+            <a:r>
+              <a:rPr sz="850" b="0" dirty="0" err="1">
+                <a:solidFill>
+                  <a:srgbClr val="64748B"/>
+                </a:solidFill>
+                <a:latin typeface="Aptos"/>
+              </a:rPr>
+              <a:t>recuperación</a:t>
+            </a:r>
+            <a:r>
+              <a:rPr sz="850" b="0" dirty="0">
+                <a:solidFill>
+                  <a:srgbClr val="64748B"/>
+                </a:solidFill>
+                <a:latin typeface="Aptos"/>
+              </a:rPr>
+              <a:t> </a:t>
+            </a:r>
+            <a:r>
+              <a:rPr sz="850" b="0" dirty="0" err="1">
+                <a:solidFill>
+                  <a:srgbClr val="64748B"/>
+                </a:solidFill>
+                <a:latin typeface="Aptos"/>
+              </a:rPr>
+              <a:t>aumentada</a:t>
+            </a:r>
+            <a:r>
+              <a:rPr sz="850" b="0" dirty="0">
+                <a:solidFill>
+                  <a:srgbClr val="64748B"/>
+                </a:solidFill>
+                <a:latin typeface="Aptos"/>
+              </a:rPr>
+              <a:t> | 2</a:t>
+            </a:r>
+            <a:r>
+              <a:rPr lang="es-419" sz="850" b="0" dirty="0">
+                <a:solidFill>
+                  <a:srgbClr val="64748B"/>
+                </a:solidFill>
+                <a:latin typeface="Aptos"/>
+              </a:rPr>
+              <a:t>0</a:t>
+            </a:r>
+            <a:endParaRPr sz="850" b="0" dirty="0">
+              <a:solidFill>
+                <a:srgbClr val="64748B"/>
+              </a:solidFill>
+              <a:latin typeface="Aptos"/>
+            </a:endParaRPr>
+          </a:p>
+        </p:txBody>
+      </p:sp>
+      <p:sp>
+        <p:nvSpPr>
+          <p:cNvPr id="6" name="TextBox 5"/>
           <p:cNvSpPr txBox="1"/>
           <p:nvPr/>
         </p:nvSpPr>
         <p:spPr>
           <a:xfrm>
-            <a:off x="978408" y="1463040"/>
-            <a:ext cx="2926080" cy="320040"/>
+            <a:off x="914400" y="1417320"/>
+            <a:ext cx="10149840" cy="4480560"/>
           </a:xfrm>
           <a:prstGeom prst="rect">
             <a:avLst/>
@@ -12789,478 +12832,88 @@
           <a:noFill/>
         </p:spPr>
         <p:txBody>
-          <a:bodyPr wrap="none">
+          <a:bodyPr wrap="square">
             <a:spAutoFit/>
           </a:bodyPr>
           <a:lstStyle/>
           <a:p>
-            <a:r>
-              <a:rPr sz="1800" b="1">
-                <a:solidFill>
-                  <a:srgbClr val="12233C"/>
-                </a:solidFill>
-                <a:latin typeface="Aptos"/>
-              </a:rPr>
-              <a:t>1. Corpus</a:t>
-            </a:r>
-          </a:p>
-        </p:txBody>
-      </p:sp>
-      <p:sp>
-        <p:nvSpPr>
-          <p:cNvPr id="9" name="TextBox 8"/>
-          <p:cNvSpPr txBox="1"/>
-          <p:nvPr/>
-        </p:nvSpPr>
-        <p:spPr>
-          <a:xfrm>
-            <a:off x="978408" y="1856232"/>
-            <a:ext cx="2926080" cy="3685032"/>
-          </a:xfrm>
-          <a:prstGeom prst="rect">
-            <a:avLst/>
-          </a:prstGeom>
-          <a:noFill/>
-        </p:spPr>
-        <p:txBody>
-          <a:bodyPr wrap="square" lIns="0" tIns="0" rIns="0" bIns="0">
-            <a:spAutoFit/>
-          </a:bodyPr>
-          <a:lstStyle/>
-          <a:p>
             <a:pPr>
               <a:spcAft>
-                <a:spcPts val="300"/>
+                <a:spcPts val="800"/>
               </a:spcAft>
-              <a:defRPr sz="1500">
-                <a:solidFill>
-                  <a:srgbClr val="475569"/>
+              <a:defRPr sz="2300">
+                <a:solidFill>
+                  <a:srgbClr val="0F172A"/>
                 </a:solidFill>
                 <a:latin typeface="Aptos"/>
               </a:defRPr>
             </a:pPr>
             <a:r>
-              <a:t>¿Qué documentos entran?</a:t>
+              <a:t>Un embedding transforma contenido en una coordenada semántica.</a:t>
             </a:r>
           </a:p>
           <a:p>
             <a:pPr>
               <a:spcAft>
-                <a:spcPts val="300"/>
+                <a:spcPts val="800"/>
               </a:spcAft>
-              <a:defRPr sz="1500">
-                <a:solidFill>
-                  <a:srgbClr val="475569"/>
+              <a:defRPr sz="2300">
+                <a:solidFill>
+                  <a:srgbClr val="0F172A"/>
                 </a:solidFill>
                 <a:latin typeface="Aptos"/>
               </a:defRPr>
             </a:pPr>
-            <a:endParaRPr/>
+            <a:r>
+              <a:t>Una base vectorial permite recuperar vecinos cercanos con sus metadatos.</a:t>
+            </a:r>
           </a:p>
           <a:p>
             <a:pPr>
               <a:spcAft>
-                <a:spcPts val="300"/>
+                <a:spcPts val="800"/>
               </a:spcAft>
-              <a:defRPr sz="1500">
-                <a:solidFill>
-                  <a:srgbClr val="475569"/>
+              <a:defRPr sz="2300">
+                <a:solidFill>
+                  <a:srgbClr val="0F172A"/>
                 </a:solidFill>
                 <a:latin typeface="Aptos"/>
               </a:defRPr>
             </a:pPr>
             <a:r>
-              <a:t>Diapositivas, READMEs, código, lecturas, notas.</a:t>
-            </a:r>
-          </a:p>
-        </p:txBody>
-      </p:sp>
-      <p:sp>
-        <p:nvSpPr>
-          <p:cNvPr id="10" name="Rounded Rectangle 9"/>
-          <p:cNvSpPr/>
-          <p:nvPr/>
-        </p:nvSpPr>
-        <p:spPr>
-          <a:xfrm>
-            <a:off x="4434840" y="1325880"/>
-            <a:ext cx="3246120" cy="4343400"/>
-          </a:xfrm>
-          <a:prstGeom prst="roundRect">
-            <a:avLst/>
-          </a:prstGeom>
-          <a:solidFill>
-            <a:srgbClr val="DBEAFE"/>
-          </a:solidFill>
-          <a:ln w="12700">
-            <a:solidFill>
-              <a:srgbClr val="CBD5E1"/>
-            </a:solidFill>
-          </a:ln>
-        </p:spPr>
-        <p:style>
-          <a:lnRef idx="1">
-            <a:schemeClr val="accent1"/>
-          </a:lnRef>
-          <a:fillRef idx="3">
-            <a:schemeClr val="accent1"/>
-          </a:fillRef>
-          <a:effectRef idx="2">
-            <a:schemeClr val="accent1"/>
-          </a:effectRef>
-          <a:fontRef idx="minor">
-            <a:schemeClr val="lt1"/>
-          </a:fontRef>
-        </p:style>
-        <p:txBody>
-          <a:bodyPr rtlCol="0" anchor="ctr"/>
-          <a:lstStyle/>
-          <a:p>
-            <a:pPr algn="ctr"/>
-            <a:endParaRPr/>
-          </a:p>
-        </p:txBody>
-      </p:sp>
-      <p:sp>
-        <p:nvSpPr>
-          <p:cNvPr id="11" name="Rectangle 10"/>
-          <p:cNvSpPr/>
-          <p:nvPr/>
-        </p:nvSpPr>
-        <p:spPr>
-          <a:xfrm>
-            <a:off x="4434840" y="1325880"/>
-            <a:ext cx="73152" cy="4343400"/>
-          </a:xfrm>
-          <a:prstGeom prst="rect">
-            <a:avLst/>
-          </a:prstGeom>
-          <a:solidFill>
-            <a:srgbClr val="2563EB"/>
-          </a:solidFill>
-          <a:ln>
-            <a:noFill/>
-          </a:ln>
-        </p:spPr>
-        <p:style>
-          <a:lnRef idx="1">
-            <a:schemeClr val="accent1"/>
-          </a:lnRef>
-          <a:fillRef idx="3">
-            <a:schemeClr val="accent1"/>
-          </a:fillRef>
-          <a:effectRef idx="2">
-            <a:schemeClr val="accent1"/>
-          </a:effectRef>
-          <a:fontRef idx="minor">
-            <a:schemeClr val="lt1"/>
-          </a:fontRef>
-        </p:style>
-        <p:txBody>
-          <a:bodyPr rtlCol="0" anchor="ctr"/>
-          <a:lstStyle/>
-          <a:p>
-            <a:pPr algn="ctr"/>
-            <a:endParaRPr/>
-          </a:p>
-        </p:txBody>
-      </p:sp>
-      <p:sp>
-        <p:nvSpPr>
-          <p:cNvPr id="12" name="TextBox 11"/>
-          <p:cNvSpPr txBox="1"/>
-          <p:nvPr/>
-        </p:nvSpPr>
-        <p:spPr>
-          <a:xfrm>
-            <a:off x="4636008" y="1463040"/>
-            <a:ext cx="2926080" cy="320040"/>
-          </a:xfrm>
-          <a:prstGeom prst="rect">
-            <a:avLst/>
-          </a:prstGeom>
-          <a:noFill/>
-        </p:spPr>
-        <p:txBody>
-          <a:bodyPr wrap="none">
-            <a:spAutoFit/>
-          </a:bodyPr>
-          <a:lstStyle/>
-          <a:p>
-            <a:r>
-              <a:rPr sz="1800" b="1">
-                <a:solidFill>
-                  <a:srgbClr val="12233C"/>
-                </a:solidFill>
-                <a:latin typeface="Aptos"/>
-              </a:rPr>
-              <a:t>2. Recuperación</a:t>
-            </a:r>
-          </a:p>
-        </p:txBody>
-      </p:sp>
-      <p:sp>
-        <p:nvSpPr>
-          <p:cNvPr id="13" name="TextBox 12"/>
-          <p:cNvSpPr txBox="1"/>
-          <p:nvPr/>
-        </p:nvSpPr>
-        <p:spPr>
-          <a:xfrm>
-            <a:off x="4636008" y="1856232"/>
-            <a:ext cx="2926080" cy="3685032"/>
-          </a:xfrm>
-          <a:prstGeom prst="rect">
-            <a:avLst/>
-          </a:prstGeom>
-          <a:noFill/>
-        </p:spPr>
-        <p:txBody>
-          <a:bodyPr wrap="square" lIns="0" tIns="0" rIns="0" bIns="0">
-            <a:spAutoFit/>
-          </a:bodyPr>
-          <a:lstStyle/>
+              <a:t>RAG usa retrieval para darle evidencia externa a un LLM.</a:t>
+            </a:r>
+          </a:p>
           <a:p>
             <a:pPr>
               <a:spcAft>
-                <a:spcPts val="300"/>
+                <a:spcPts val="800"/>
               </a:spcAft>
-              <a:defRPr sz="1500">
-                <a:solidFill>
-                  <a:srgbClr val="475569"/>
+              <a:defRPr sz="2300">
+                <a:solidFill>
+                  <a:srgbClr val="0F172A"/>
                 </a:solidFill>
                 <a:latin typeface="Aptos"/>
               </a:defRPr>
             </a:pPr>
             <a:r>
-              <a:t>¿Cómo partirías chunks?</a:t>
+              <a:t>La calidad depende de chunking, embeddings, filtros, ranking, prompt y evaluación.</a:t>
             </a:r>
           </a:p>
           <a:p>
             <a:pPr>
               <a:spcAft>
-                <a:spcPts val="300"/>
+                <a:spcPts val="800"/>
               </a:spcAft>
-              <a:defRPr sz="1500">
-                <a:solidFill>
-                  <a:srgbClr val="475569"/>
+              <a:defRPr sz="2300">
+                <a:solidFill>
+                  <a:srgbClr val="0F172A"/>
                 </a:solidFill>
                 <a:latin typeface="Aptos"/>
               </a:defRPr>
             </a:pPr>
             <a:r>
-              <a:t>¿Qué metadatos usarías?</a:t>
-            </a:r>
-          </a:p>
-          <a:p>
-            <a:pPr>
-              <a:spcAft>
-                <a:spcPts val="300"/>
-              </a:spcAft>
-              <a:defRPr sz="1500">
-                <a:solidFill>
-                  <a:srgbClr val="475569"/>
-                </a:solidFill>
-                <a:latin typeface="Aptos"/>
-              </a:defRPr>
-            </a:pPr>
-            <a:r>
-              <a:t>¿Cuánto top-k?</a:t>
-            </a:r>
-          </a:p>
-        </p:txBody>
-      </p:sp>
-      <p:sp>
-        <p:nvSpPr>
-          <p:cNvPr id="14" name="Rounded Rectangle 13"/>
-          <p:cNvSpPr/>
-          <p:nvPr/>
-        </p:nvSpPr>
-        <p:spPr>
-          <a:xfrm>
-            <a:off x="8092440" y="1325880"/>
-            <a:ext cx="3246120" cy="4343400"/>
-          </a:xfrm>
-          <a:prstGeom prst="roundRect">
-            <a:avLst/>
-          </a:prstGeom>
-          <a:solidFill>
-            <a:srgbClr val="DCFCE7"/>
-          </a:solidFill>
-          <a:ln w="12700">
-            <a:solidFill>
-              <a:srgbClr val="CBD5E1"/>
-            </a:solidFill>
-          </a:ln>
-        </p:spPr>
-        <p:style>
-          <a:lnRef idx="1">
-            <a:schemeClr val="accent1"/>
-          </a:lnRef>
-          <a:fillRef idx="3">
-            <a:schemeClr val="accent1"/>
-          </a:fillRef>
-          <a:effectRef idx="2">
-            <a:schemeClr val="accent1"/>
-          </a:effectRef>
-          <a:fontRef idx="minor">
-            <a:schemeClr val="lt1"/>
-          </a:fontRef>
-        </p:style>
-        <p:txBody>
-          <a:bodyPr rtlCol="0" anchor="ctr"/>
-          <a:lstStyle/>
-          <a:p>
-            <a:pPr algn="ctr"/>
-            <a:endParaRPr/>
-          </a:p>
-        </p:txBody>
-      </p:sp>
-      <p:sp>
-        <p:nvSpPr>
-          <p:cNvPr id="15" name="Rectangle 14"/>
-          <p:cNvSpPr/>
-          <p:nvPr/>
-        </p:nvSpPr>
-        <p:spPr>
-          <a:xfrm>
-            <a:off x="8092440" y="1325880"/>
-            <a:ext cx="73152" cy="4343400"/>
-          </a:xfrm>
-          <a:prstGeom prst="rect">
-            <a:avLst/>
-          </a:prstGeom>
-          <a:solidFill>
-            <a:srgbClr val="16A34A"/>
-          </a:solidFill>
-          <a:ln>
-            <a:noFill/>
-          </a:ln>
-        </p:spPr>
-        <p:style>
-          <a:lnRef idx="1">
-            <a:schemeClr val="accent1"/>
-          </a:lnRef>
-          <a:fillRef idx="3">
-            <a:schemeClr val="accent1"/>
-          </a:fillRef>
-          <a:effectRef idx="2">
-            <a:schemeClr val="accent1"/>
-          </a:effectRef>
-          <a:fontRef idx="minor">
-            <a:schemeClr val="lt1"/>
-          </a:fontRef>
-        </p:style>
-        <p:txBody>
-          <a:bodyPr rtlCol="0" anchor="ctr"/>
-          <a:lstStyle/>
-          <a:p>
-            <a:pPr algn="ctr"/>
-            <a:endParaRPr/>
-          </a:p>
-        </p:txBody>
-      </p:sp>
-      <p:sp>
-        <p:nvSpPr>
-          <p:cNvPr id="16" name="TextBox 15"/>
-          <p:cNvSpPr txBox="1"/>
-          <p:nvPr/>
-        </p:nvSpPr>
-        <p:spPr>
-          <a:xfrm>
-            <a:off x="8293608" y="1463040"/>
-            <a:ext cx="2926080" cy="320040"/>
-          </a:xfrm>
-          <a:prstGeom prst="rect">
-            <a:avLst/>
-          </a:prstGeom>
-          <a:noFill/>
-        </p:spPr>
-        <p:txBody>
-          <a:bodyPr wrap="none">
-            <a:spAutoFit/>
-          </a:bodyPr>
-          <a:lstStyle/>
-          <a:p>
-            <a:r>
-              <a:rPr sz="1800" b="1">
-                <a:solidFill>
-                  <a:srgbClr val="12233C"/>
-                </a:solidFill>
-                <a:latin typeface="Aptos"/>
-              </a:rPr>
-              <a:t>3. Respuesta</a:t>
-            </a:r>
-          </a:p>
-        </p:txBody>
-      </p:sp>
-      <p:sp>
-        <p:nvSpPr>
-          <p:cNvPr id="17" name="TextBox 16"/>
-          <p:cNvSpPr txBox="1"/>
-          <p:nvPr/>
-        </p:nvSpPr>
-        <p:spPr>
-          <a:xfrm>
-            <a:off x="8293608" y="1856232"/>
-            <a:ext cx="2926080" cy="3685032"/>
-          </a:xfrm>
-          <a:prstGeom prst="rect">
-            <a:avLst/>
-          </a:prstGeom>
-          <a:noFill/>
-        </p:spPr>
-        <p:txBody>
-          <a:bodyPr wrap="square" lIns="0" tIns="0" rIns="0" bIns="0">
-            <a:spAutoFit/>
-          </a:bodyPr>
-          <a:lstStyle/>
-          <a:p>
-            <a:pPr>
-              <a:spcAft>
-                <a:spcPts val="300"/>
-              </a:spcAft>
-              <a:defRPr sz="1500">
-                <a:solidFill>
-                  <a:srgbClr val="475569"/>
-                </a:solidFill>
-                <a:latin typeface="Aptos"/>
-              </a:defRPr>
-            </a:pPr>
-            <a:r>
-              <a:t>¿Cuándo debe citar?</a:t>
-            </a:r>
-          </a:p>
-          <a:p>
-            <a:pPr>
-              <a:spcAft>
-                <a:spcPts val="300"/>
-              </a:spcAft>
-              <a:defRPr sz="1500">
-                <a:solidFill>
-                  <a:srgbClr val="475569"/>
-                </a:solidFill>
-                <a:latin typeface="Aptos"/>
-              </a:defRPr>
-            </a:pPr>
-            <a:r>
-              <a:t>¿Cuándo debe decir “no sé”?</a:t>
-            </a:r>
-          </a:p>
-          <a:p>
-            <a:pPr>
-              <a:spcAft>
-                <a:spcPts val="300"/>
-              </a:spcAft>
-              <a:defRPr sz="1500">
-                <a:solidFill>
-                  <a:srgbClr val="475569"/>
-                </a:solidFill>
-                <a:latin typeface="Aptos"/>
-              </a:defRPr>
-            </a:pPr>
-            <a:r>
-              <a:t>¿Cómo evaluarías?</a:t>
+              <a:t>Un buen RAG responde mejor cuando tiene evidencia y se abstiene cuando no la tiene.</a:t>
             </a:r>
           </a:p>
         </p:txBody>
@@ -14051,286 +13704,116 @@
           </a:p>
         </p:txBody>
       </p:sp>
+      <p:pic>
+        <p:nvPicPr>
+          <p:cNvPr id="19" name="Imagen 18">
+            <a:extLst>
+              <a:ext uri="{FF2B5EF4-FFF2-40B4-BE49-F238E27FC236}">
+                <a16:creationId xmlns:a16="http://schemas.microsoft.com/office/drawing/2014/main" id="{85E7591B-8B3C-B5CE-282E-6FC8764954FE}"/>
+              </a:ext>
+            </a:extLst>
+          </p:cNvPr>
+          <p:cNvPicPr>
+            <a:picLocks noChangeAspect="1"/>
+          </p:cNvPicPr>
+          <p:nvPr/>
+        </p:nvPicPr>
+        <p:blipFill>
+          <a:blip r:embed="rId2"/>
+          <a:stretch>
+            <a:fillRect/>
+          </a:stretch>
+        </p:blipFill>
+        <p:spPr>
+          <a:xfrm>
+            <a:off x="343154" y="384048"/>
+            <a:ext cx="11505385" cy="6388227"/>
+          </a:xfrm>
+          <a:prstGeom prst="rect">
+            <a:avLst/>
+          </a:prstGeom>
+        </p:spPr>
+      </p:pic>
     </p:spTree>
   </p:cSld>
   <p:clrMapOvr>
     <a:masterClrMapping/>
   </p:clrMapOvr>
-</p:sld>
-</file>
-
-<file path=ppt/slides/slide20.xml><?xml version="1.0" encoding="utf-8"?>
-<p:sld xmlns:a="http://schemas.openxmlformats.org/drawingml/2006/main" xmlns:r="http://schemas.openxmlformats.org/officeDocument/2006/relationships" xmlns:p="http://schemas.openxmlformats.org/presentationml/2006/main">
-  <p:cSld>
-    <p:spTree>
-      <p:nvGrpSpPr>
-        <p:cNvPr id="1" name=""/>
-        <p:cNvGrpSpPr/>
-        <p:nvPr/>
-      </p:nvGrpSpPr>
-      <p:grpSpPr>
-        <a:xfrm>
-          <a:off x="0" y="0"/>
-          <a:ext cx="0" cy="0"/>
-          <a:chOff x="0" y="0"/>
-          <a:chExt cx="0" cy="0"/>
-        </a:xfrm>
-      </p:grpSpPr>
-      <p:sp>
-        <p:nvSpPr>
-          <p:cNvPr id="2" name="Rectangle 1"/>
-          <p:cNvSpPr/>
-          <p:nvPr/>
-        </p:nvSpPr>
-        <p:spPr>
-          <a:xfrm>
-            <a:off x="0" y="0"/>
-            <a:ext cx="12191695" cy="6858000"/>
-          </a:xfrm>
-          <a:prstGeom prst="rect">
-            <a:avLst/>
-          </a:prstGeom>
-          <a:solidFill>
-            <a:srgbClr val="F8FAFC"/>
-          </a:solidFill>
-          <a:ln>
-            <a:noFill/>
-          </a:ln>
-        </p:spPr>
-        <p:style>
-          <a:lnRef idx="1">
-            <a:schemeClr val="accent1"/>
-          </a:lnRef>
-          <a:fillRef idx="3">
-            <a:schemeClr val="accent1"/>
-          </a:fillRef>
-          <a:effectRef idx="2">
-            <a:schemeClr val="accent1"/>
-          </a:effectRef>
-          <a:fontRef idx="minor">
-            <a:schemeClr val="lt1"/>
-          </a:fontRef>
-        </p:style>
-        <p:txBody>
-          <a:bodyPr rtlCol="0" anchor="ctr"/>
-          <a:lstStyle/>
-          <a:p>
-            <a:pPr algn="ctr"/>
-            <a:endParaRPr/>
-          </a:p>
-        </p:txBody>
-      </p:sp>
-      <p:sp>
-        <p:nvSpPr>
-          <p:cNvPr id="3" name="TextBox 2"/>
-          <p:cNvSpPr txBox="1"/>
-          <p:nvPr/>
-        </p:nvSpPr>
-        <p:spPr>
-          <a:xfrm>
-            <a:off x="594360" y="384048"/>
-            <a:ext cx="10972800" cy="502920"/>
-          </a:xfrm>
-          <a:prstGeom prst="rect">
-            <a:avLst/>
-          </a:prstGeom>
-          <a:noFill/>
-        </p:spPr>
-        <p:txBody>
-          <a:bodyPr wrap="none">
-            <a:spAutoFit/>
-          </a:bodyPr>
-          <a:lstStyle/>
-          <a:p>
-            <a:r>
-              <a:rPr sz="3000" b="1">
-                <a:solidFill>
-                  <a:srgbClr val="12233C"/>
-                </a:solidFill>
-                <a:latin typeface="Aptos"/>
-              </a:rPr>
-              <a:t>Resumen</a:t>
-            </a:r>
-          </a:p>
-        </p:txBody>
-      </p:sp>
-      <p:sp>
-        <p:nvSpPr>
-          <p:cNvPr id="4" name="TextBox 3"/>
-          <p:cNvSpPr txBox="1"/>
-          <p:nvPr/>
-        </p:nvSpPr>
-        <p:spPr>
-          <a:xfrm>
-            <a:off x="621792" y="932688"/>
-            <a:ext cx="10881360" cy="320040"/>
-          </a:xfrm>
-          <a:prstGeom prst="rect">
-            <a:avLst/>
-          </a:prstGeom>
-          <a:noFill/>
-        </p:spPr>
-        <p:txBody>
-          <a:bodyPr wrap="none">
-            <a:spAutoFit/>
-          </a:bodyPr>
-          <a:lstStyle/>
-          <a:p>
-            <a:r>
-              <a:rPr sz="1300" b="0">
-                <a:solidFill>
-                  <a:srgbClr val="64748B"/>
-                </a:solidFill>
-                <a:latin typeface="Aptos"/>
-              </a:rPr>
-              <a:t>La idea completa en cinco frases.</a:t>
-            </a:r>
-          </a:p>
-        </p:txBody>
-      </p:sp>
-      <p:sp>
-        <p:nvSpPr>
-          <p:cNvPr id="5" name="TextBox 4"/>
-          <p:cNvSpPr txBox="1"/>
-          <p:nvPr/>
-        </p:nvSpPr>
-        <p:spPr>
-          <a:xfrm>
-            <a:off x="594360" y="6419088"/>
-            <a:ext cx="10972800" cy="228600"/>
-          </a:xfrm>
-          <a:prstGeom prst="rect">
-            <a:avLst/>
-          </a:prstGeom>
-          <a:noFill/>
-        </p:spPr>
-        <p:txBody>
-          <a:bodyPr wrap="none">
-            <a:spAutoFit/>
-          </a:bodyPr>
-          <a:lstStyle/>
-          <a:p>
-            <a:pPr algn="r"/>
-            <a:r>
-              <a:rPr sz="850" b="0">
-                <a:solidFill>
-                  <a:srgbClr val="64748B"/>
-                </a:solidFill>
-                <a:latin typeface="Aptos"/>
-              </a:rPr>
-              <a:t>RAG | Embeddings, bases vectoriales y sistemas de recuperación aumentada | 21</a:t>
-            </a:r>
-          </a:p>
-        </p:txBody>
-      </p:sp>
-      <p:sp>
-        <p:nvSpPr>
-          <p:cNvPr id="6" name="TextBox 5"/>
-          <p:cNvSpPr txBox="1"/>
-          <p:nvPr/>
-        </p:nvSpPr>
-        <p:spPr>
-          <a:xfrm>
-            <a:off x="914400" y="1417320"/>
-            <a:ext cx="10149840" cy="4480560"/>
-          </a:xfrm>
-          <a:prstGeom prst="rect">
-            <a:avLst/>
-          </a:prstGeom>
-          <a:noFill/>
-        </p:spPr>
-        <p:txBody>
-          <a:bodyPr wrap="square">
-            <a:spAutoFit/>
-          </a:bodyPr>
-          <a:lstStyle/>
-          <a:p>
-            <a:pPr>
-              <a:spcAft>
-                <a:spcPts val="800"/>
-              </a:spcAft>
-              <a:defRPr sz="2300">
-                <a:solidFill>
-                  <a:srgbClr val="0F172A"/>
-                </a:solidFill>
-                <a:latin typeface="Aptos"/>
-              </a:defRPr>
-            </a:pPr>
-            <a:r>
-              <a:t>Un embedding transforma contenido en una coordenada semántica.</a:t>
-            </a:r>
-          </a:p>
-          <a:p>
-            <a:pPr>
-              <a:spcAft>
-                <a:spcPts val="800"/>
-              </a:spcAft>
-              <a:defRPr sz="2300">
-                <a:solidFill>
-                  <a:srgbClr val="0F172A"/>
-                </a:solidFill>
-                <a:latin typeface="Aptos"/>
-              </a:defRPr>
-            </a:pPr>
-            <a:r>
-              <a:t>Una base vectorial permite recuperar vecinos cercanos con sus metadatos.</a:t>
-            </a:r>
-          </a:p>
-          <a:p>
-            <a:pPr>
-              <a:spcAft>
-                <a:spcPts val="800"/>
-              </a:spcAft>
-              <a:defRPr sz="2300">
-                <a:solidFill>
-                  <a:srgbClr val="0F172A"/>
-                </a:solidFill>
-                <a:latin typeface="Aptos"/>
-              </a:defRPr>
-            </a:pPr>
-            <a:r>
-              <a:t>RAG usa retrieval para darle evidencia externa a un LLM.</a:t>
-            </a:r>
-          </a:p>
-          <a:p>
-            <a:pPr>
-              <a:spcAft>
-                <a:spcPts val="800"/>
-              </a:spcAft>
-              <a:defRPr sz="2300">
-                <a:solidFill>
-                  <a:srgbClr val="0F172A"/>
-                </a:solidFill>
-                <a:latin typeface="Aptos"/>
-              </a:defRPr>
-            </a:pPr>
-            <a:r>
-              <a:t>La calidad depende de chunking, embeddings, filtros, ranking, prompt y evaluación.</a:t>
-            </a:r>
-          </a:p>
-          <a:p>
-            <a:pPr>
-              <a:spcAft>
-                <a:spcPts val="800"/>
-              </a:spcAft>
-              <a:defRPr sz="2300">
-                <a:solidFill>
-                  <a:srgbClr val="0F172A"/>
-                </a:solidFill>
-                <a:latin typeface="Aptos"/>
-              </a:defRPr>
-            </a:pPr>
-            <a:r>
-              <a:t>Un buen RAG responde mejor cuando tiene evidencia y se abstiene cuando no la tiene.</a:t>
-            </a:r>
-          </a:p>
-        </p:txBody>
-      </p:sp>
-    </p:spTree>
-  </p:cSld>
-  <p:clrMapOvr>
-    <a:masterClrMapping/>
-  </p:clrMapOvr>
+  <p:timing>
+    <p:tnLst>
+      <p:par>
+        <p:cTn id="1" dur="indefinite" restart="never" nodeType="tmRoot">
+          <p:childTnLst>
+            <p:seq concurrent="1" nextAc="seek">
+              <p:cTn id="2" dur="indefinite" nodeType="mainSeq">
+                <p:childTnLst>
+                  <p:par>
+                    <p:cTn id="3" fill="hold">
+                      <p:stCondLst>
+                        <p:cond delay="indefinite"/>
+                      </p:stCondLst>
+                      <p:childTnLst>
+                        <p:par>
+                          <p:cTn id="4" fill="hold">
+                            <p:stCondLst>
+                              <p:cond delay="0"/>
+                            </p:stCondLst>
+                            <p:childTnLst>
+                              <p:par>
+                                <p:cTn id="5" presetID="1" presetClass="entr" presetSubtype="0" fill="hold" nodeType="clickEffect">
+                                  <p:stCondLst>
+                                    <p:cond delay="0"/>
+                                  </p:stCondLst>
+                                  <p:childTnLst>
+                                    <p:set>
+                                      <p:cBhvr>
+                                        <p:cTn id="6" dur="1" fill="hold">
+                                          <p:stCondLst>
+                                            <p:cond delay="0"/>
+                                          </p:stCondLst>
+                                        </p:cTn>
+                                        <p:tgtEl>
+                                          <p:spTgt spid="19"/>
+                                        </p:tgtEl>
+                                        <p:attrNameLst>
+                                          <p:attrName>style.visibility</p:attrName>
+                                        </p:attrNameLst>
+                                      </p:cBhvr>
+                                      <p:to>
+                                        <p:strVal val="visible"/>
+                                      </p:to>
+                                    </p:set>
+                                  </p:childTnLst>
+                                </p:cTn>
+                              </p:par>
+                            </p:childTnLst>
+                          </p:cTn>
+                        </p:par>
+                      </p:childTnLst>
+                    </p:cTn>
+                  </p:par>
+                </p:childTnLst>
+              </p:cTn>
+              <p:prevCondLst>
+                <p:cond evt="onPrev" delay="0">
+                  <p:tgtEl>
+                    <p:sldTgt/>
+                  </p:tgtEl>
+                </p:cond>
+              </p:prevCondLst>
+              <p:nextCondLst>
+                <p:cond evt="onNext" delay="0">
+                  <p:tgtEl>
+                    <p:sldTgt/>
+                  </p:tgtEl>
+                </p:cond>
+              </p:nextCondLst>
+            </p:seq>
+          </p:childTnLst>
+        </p:cTn>
+      </p:par>
+    </p:tnLst>
+  </p:timing>
 </p:sld>
 </file>
 
